--- a/산출물/교재/PPTX/실전반_온라인/실전반_07일차.pptx
+++ b/산출물/교재/PPTX/실전반_온라인/실전반_07일차.pptx
@@ -912,7 +912,7 @@
           <a:lstStyle/>
           <a:p>
             <a:r>
-              <a:t>경보는 자기 패턴을 시작 조건으로 가진 정의를 찾아간다고 했죠. 그런데 같은 패턴을 시작 조건으로 가진 정의가 둘이라면 어떻게 될까요? 이걸 보려면 앞 회차에서 본 등록과 배포의 차이를 떠올려야 해요. 화면 첫 칸, 등록은 판본을 저장하는 일입니다. 둘째 칸, 배포를 해야 그 판본이 경보를 받고요. 이렇게 배포해서 경보를 받게 된 정의를 화면에서는 흐름이라고 부릅니다. 시스템에 처음부터 있던 것은 기준 흐름, 내가 배포한 것은 내 흐름이에요. 답은 셋째 칸에 있습니다. 경보는 그 패턴을 시작 조건으로 가진 흐름 가운데 가장 최근에 배포한 것이 받아요. 배포된 흐름이 하나도 없으면 경보는 기준 흐름 쪽으로 갑니다. 기준 흐름은 원래 설비 경보를 받던 흐름이라서, 정기 점검이나 재고 부족처럼 다루지 않는 경보는 사람이 검토하는 자리로 보내요. 결국 배포는 경보가 가는 길을 바꾸는 일이에요. 등록과 배포를 나눠 둔 까닭도 여기 있습니다. 새 판본을 등록해 두기만 하면 지금 경보를 받는 흐름은 그대로 돌아가니까, 준비가 끝났을 때 배포 한 번으로 길을 바꿀 수 있죠. 여러 사람이 한 시스템을 같이 쓰면서 각자 흐름을 배포하면 어떻게 될까요? 마지막에 배포한 사람의 흐름이 경보를 가져갑니다. 그래서 넷째 칸의 되돌리기가 필요해요. HYD의 기준 흐름으로 되돌리기는 같은 사용 공간에 배포된 사용자 흐름들을 경보 경로에서 내리는 동작입니다. 내 것 하나만 되돌리는 동작으로 생각하면 안 돼요. 공용 환경에서는 다른 사람의 배포에도 영향을 주므로, 학생별 환경을 쓰거나 진행 순서와 되돌릴 시점을 운영자와 맞춥니다. 등록해 둔 판본은 지워지지 않으니까 필요하면 다시 배포하면 되고요. 실습에서 흐름을 배포하고 실행할 때 이 규칙을 그대로 겪게 될 거예요.</a:t>
+              <a:t>경보는 자기 패턴을 시작 조건으로 가진 정의를 찾아간다고 했죠. 그런데 같은 패턴을 시작 조건으로 가진 정의가 둘이라면 어떻게 될까요? 이걸 보려면 앞 회차에서 본 등록과 배포의 차이를 떠올려야 해요. 화면 첫 칸, 등록은 판본을 저장하는 일입니다. 둘째 칸, 배포를 해야 그 판본이 경보를 받고요. 이렇게 배포해서 경보를 받게 된 정의를 화면에서는 흐름이라고 부릅니다. 시스템에 처음부터 있던 것은 기준 흐름, 내가 배포한 것은 내 흐름이에요. 답은 셋째 칸에 있습니다. 경보는 그 패턴을 시작 조건으로 가진 흐름 가운데 가장 최근에 배포한 것이 받아요. 배포된 흐름이 하나도 없으면 경보는 기준 흐름 쪽으로 갑니다. 기준 흐름은 원래 설비 경보를 받던 흐름이라서, 정기 점검이나 재고 부족처럼 다루지 않는 경보는 사람이 검토하는 자리로 보내요. 결국 배포는 경보가 가는 길을 바꾸는 일이에요. 등록과 배포를 나눠 둔 까닭도 여기 있습니다. 새 판본을 등록해 두기만 하면 지금 경보를 받는 흐름은 그대로 돌아가니까, 준비가 끝났을 때 배포 한 번으로 길을 바꿀 수 있죠. 여러 사람이 한 시스템을 같이 쓰면서 각자 흐름을 배포하면 어떻게 될까요? 마지막에 배포한 사람의 흐름이 경보를 가져갑니다. 그래서 넷째 칸의 되돌리기가 필요해요. HYD의 기준 흐름으로 되돌리기는 같은 사용 공간에 배포된 사용자 흐름들을 경보 경로에서 내리는 동작입니다. 내 것 하나만 되돌리는 동작으로 생각하면 안 돼요. 공용 환경에서는 다른 사람의 배포에도 영향을 주므로, 강사에게 배정된 환경을 확인하고 진행 순서와 되돌릴 시점을 운영자와 맞춥니다. 등록해 둔 판본은 지워지지 않으니까 필요하면 다시 배포하면 되고요. 실습에서 흐름을 배포하고 실행할 때 이 규칙을 그대로 겪게 될 거예요.</a:t>
             </a:r>
           </a:p>
         </p:txBody>
@@ -1122,7 +1122,7 @@
           <a:lstStyle/>
           <a:p>
             <a:r>
-              <a:t>처리 건에는 결과만 남는 게 아닙니다. 단계마다 누가 맡았고, 언제 시작해서 언제 끝났는지도 남아요. 화면의 표가 쿨러 사건 처리 건에 남은 단계 기록입니다. 위에서 아래로 시간 순서예요. 맨 위 에이전트 단계는 경보 직후에 열려서 1분 반쯤 원인을 진단하고 추천안을 만들었습니다. 이어서 운전원 승인이 열렸고, 이 시연에서는 십여 초 만에 승인됐어요. 승인 다음의 냉각 명령은 1초도 안 걸렸습니다. 재관측은 유온이 내려가는지 지켜보는 단계입니다. 화면의 약 1분은 20배속으로 진행한 이 시연의 기록이에요. 현장에서도 늘 1분을 기다리면 된다는 기준이 아닙니다. 작업지시 등록과 결과 보고는 순식간에 끝났어요. 끝 시각에서 시작 시각을 빼면 단계마다 걸린 시간이 나오죠. 앞 회차에서 BPM의 다섯 단계 가운데 모니터링을 봤잖아요. 업무가 어디까지 진행됐고 어디서 기다리고 있는지 지켜보는 단계였죠. 그 모니터링이 읽는 게 바로 이 기록입니다. 이 처리 건에서는 에이전트 단계와 재관측이 시간의 대부분을 차지했습니다. 여기 보이는 시각은 미리 실행해 둔 한 건의 기록입니다. 여러분의 실행은 조건과 응답 시점에 따라 달라질 수 있어요. 승인 작업이 열리고 닫힌 시간도 사람이 집중해서 검토한 시간만은 아닙니다. 담당자가 일을 보기 전까지 기다린 시간도 함께 들어갈 수 있습니다.</a:t>
+              <a:t>처리 건에는 결과만 남는 게 아닙니다. 단계마다 누가 맡았고, 언제 시작해서 언제 끝났는지도 남아요. 화면의 표가 쿨러 사건 처리 건에 남은 단계 기록입니다. 위에서 아래로 시간 순서예요. 맨 위 에이전트 단계는 경보 직후에 열려서 1분 반쯤 원인을 진단하고 추천안을 만들었습니다. 이어서 운전원 승인이 열렸고, 이 시연에서는 십여 초 만에 승인됐어요. 승인 다음의 냉각 명령은 1초도 안 걸렸습니다. 재관측은 유온이 내려가는지 지켜보는 단계입니다. 화면의 약 1분은 20배속으로 진행한 이 시연의 기록이에요. 현장에서도 늘 1분을 기다리면 된다는 기준이 아닙니다. 작업지시 등록과 결과 보고는 순식간에 끝났어요. 끝 시각에서 시작 시각을 빼면 단계마다 걸린 시간이 나오죠. 앞 회차에서 BPM의 다섯 단계 가운데 모니터링을 봤잖아요. 업무가 어디까지 진행됐고 어디서 기다리고 있는지 지켜보는 단계였죠. 그 모니터링이 읽는 게 바로 이 기록입니다. 이 처리 건에서는 에이전트 단계와 재관측이 시간의 대부분을 차지했습니다. 여기 보이는 시각은 미리 실행해 둔 한 건의 기록입니다. 수업에서 확인할 실행은 조건과 응답 시점에 따라 달라질 수 있어요. 승인 작업이 열리고 닫힌 시간도 사람이 집중해서 검토한 시간만은 아닙니다. 담당자가 일을 보기 전까지 기다린 시간도 함께 들어갈 수 있습니다.</a:t>
             </a:r>
           </a:p>
         </p:txBody>
@@ -2312,7 +2312,7 @@
           <a:lstStyle/>
           <a:p>
             <a:r>
-              <a:t>두 번째 실습은 정기 점검 프로세스의 실행입니다. 첫 실습에서 만들 그림이 경보를 받으려면 실제 에이전트와 역할, 시스템에 연결하고 배포까지 해야 하죠. 두 번째 실습은 그 일을 해서 처리 건 하나를 끝까지 보내는 겁니다. 설명 화면의 다섯 칸이 할 일의 순서예요. 첫 칸은 연결입니다. 그린 그림을 가져와서 정기 점검 도래 경보 패턴, 정비 계획 에이전트, 설비보전팀장 역할, 오더 등록과 공지 작업을 연결하고, 승인 지연의 기한 10분도 이때 넣어요. 둘째 칸은 사전 검사, 셋째 칸은 판본 등록과 배포입니다. 넷째 칸이 실행이에요. 정기 점검 도래 경보로 처리 건이 열리면, 에이전트의 추천안이 승인을 기다립니다. 그 추천안을 승인하면 마지막 칸으로 가요. 성공 기준은 정비 오더와 생산팀 공지, 결과 보고와 종료 기록이 처리 건에 남는 겁니다. 넣은 연결 값은 제공된 연결 값 파일과 대조할 수 있고요. 배포 규칙도 이 실습의 할 일에 들어 있습니다. 경보는 같은 패턴을 받는 흐름 중 최근 배포한 흐름으로 가므로, 공용 환경이라면 배포 순서를 먼저 맞춰야 해요. 되돌리기도 내 흐름 하나만의 문제가 아니니, 운영자가 정한 범위와 시점에 진행합니다. 이 실습에서는 정기 점검의 승인·거절 처리 기록을 남기고, 재고 보충은 그림부터 남아 있습니다. 사전 검사 통과와 실제 실행 성공도 구별하겠습니다. 검사에서 연결이 맞는지 본 뒤, 실행 기록에서 승인과 오더, 공지까지 확인해야 합니다.</a:t>
+              <a:t>두 번째 실습은 정기 점검 프로세스의 실행입니다. 첫 실습에서 만들 그림이 경보를 받으려면 실제 에이전트와 역할, 시스템에 연결하고 배포까지 해야 하죠. 두 번째 실습은 그 일을 해서 처리 건 하나를 끝까지 보내는 겁니다. 설명 화면의 다섯 칸이 할 일의 순서예요. 첫 칸은 연결입니다. 그린 그림을 가져와서 정기 점검 도래 경보 패턴, 정비 계획 에이전트, 설비보전팀장 역할, 오더 등록과 공지 작업을 연결하고, 승인 지연의 기한 10분도 이때 넣어요. 둘째 칸은 사전 검사, 셋째 칸은 판본 등록과 배포입니다. 넷째 칸이 실행이에요. 정기 점검 도래 경보로 처리 건이 열리면, 에이전트의 추천안이 승인을 기다립니다. 그 추천안을 승인하면 마지막 칸으로 가요. 성공 기준은 정비 오더와 생산팀 공지, 결과 보고와 종료 기록이 처리 건에 남는 겁니다. 넣은 연결 값은 제공된 연결 값 파일과 대조할 수 있고요. 배포 규칙도 이 실습의 할 일에 들어 있습니다. 경보는 같은 패턴을 받는 흐름 중 최근 배포한 흐름으로 가므로, 공용 환경이라면 배포 순서를 먼저 맞춰야 해요. 되돌리기도 내 흐름 하나만의 문제가 아니니, 운영자가 정한 범위와 시점에 진행합니다. 이 실습에서는 정기 점검의 승인·거절 처리 기록을 남기고, 이어서 재고 보충의 그림부터 만들어 보겠습니다. 사전 검사 통과와 실제 실행 성공도 구별하겠습니다. 검사에서 연결이 맞는지 본 뒤, 실행 기록에서 승인과 오더, 공지까지 확인해야 합니다.</a:t>
             </a:r>
           </a:p>
         </p:txBody>
@@ -2732,7 +2732,7 @@
           <a:lstStyle/>
           <a:p>
             <a:r>
-              <a:t>이번 시간에는 이번 회차를 정리합니다. 세 업무의 처리 건을 시작 이벤트에서 종료 기록까지 되짚고, 온톨로지와 에이전트, 프로세스가 어떻게 이어지는지 확인한 다음, 복습과 퀴즈로 마무리할게요. 앞의 실습은 정기 점검과 재고 보충 프로세스를 직접 그리고 실행해 보는 과정이었습니다. 아직 결과가 다 나오지 않았더라도, 어디까지 진행됐는지 기록을 놓고 비교해 보세요. 긴급 대응의 처리 건은 쿨러 사건으로 이미 끝까지 따라왔고요. 여기서는 강사가 확인한 기록과 비교할 수 있도록 미리 끝까지 보내 둔 처리 건 셋을 나란히 놓고 봅니다. 화면의 번호나 시각이 실습의 처리 건과 다른 건 그래서예요. 이 세 건을 되짚는 게 네 번째 단원, 세 처리 건이 지나는 다섯 자리입니다. 업무가 서로 다른 이 세 처리 건은 시작 이벤트에서 종료 기록까지 무엇을 거쳤을까요? 그 사이에 무엇이 누구에게 건너갔을까요? AI와 사람이 함께 수행한 업무 흐름을 이 세 건으로 정리해 보겠습니다.</a:t>
+              <a:t>이번 시간에는 이번 회차를 정리합니다. 세 업무의 처리 건을 시작 이벤트에서 종료 기록까지 되짚고, 온톨로지와 에이전트, 프로세스가 어떻게 이어지는지 확인한 다음, 복습과 퀴즈로 마무리할게요. 앞의 실습은 정기 점검과 재고 보충 프로세스를 직접 그리고 실행해 보는 과정이었습니다. 아직 결과가 다 나오지 않았더라도, 어디까지 진행됐는지 기록을 놓고 비교해 보겠습니다. 긴급 대응의 처리 건은 쿨러 사건으로 이미 끝까지 따라왔고요. 여기서는 강사가 확인한 기록과 비교할 수 있도록 미리 끝까지 보내 둔 처리 건 셋을 나란히 놓고 봅니다. 화면의 번호나 시각이 실습의 처리 건과 다른 건 그래서예요. 이 세 건을 되짚는 게 네 번째 단원, 세 처리 건이 지나는 다섯 자리입니다. 업무가 서로 다른 이 세 처리 건은 시작 이벤트에서 종료 기록까지 무엇을 거쳤을까요? 그 사이에 무엇이 누구에게 건너갔을까요? AI와 사람이 함께 수행한 업무 흐름을 이 세 건으로 정리해 보겠습니다.</a:t>
             </a:r>
           </a:p>
         </p:txBody>
@@ -3992,7 +3992,7 @@
           <a:lstStyle/>
           <a:p>
             <a:r>
-              <a:t>사람의 셋째 일, 프로세스를 고치는 일이 어떻게 돌아가는지 보겠습니다. 프로세스는 한 번 설계하고 끝나는 게 아니에요. 실행이 남긴 기록이 다음 설계로 돌아옵니다. 화면의 네 칸을 따라가 볼게요. 경보가 처리 건을 열고 끝 이벤트에 닿으면, 단계의 시각과 승인, 결과 보고가 기록으로 남죠. 그 기록에서 오래 걸린 단계를 찾고, 여러 건을 모아 사이클 타임과 대기 시간, 거절률로 요약합니다. 승인 응답이 오래 걸리거나 거절이 많으면, 먼저 이유를 조사합니다. 정보가 부족한지, 담당자가 없는지, 승인 기준에 문제가 있는지에 따라 바꿀 곳이 달라지죠. 확인한 원인에 맞춰 정의나 운영 방식을 고칩니다. 고친 정의는 새 판본으로 배포하고, 다음 경보부터 그 판본으로 처리 건이 열립니다. 예를 하나 들어 볼게요. 승인 대기가 자주 길어져서 지연 알림 기한을 바꾸기로 했다고 해 보죠. 업무마다 처음부터 따로 그렸다면 그림마다 다른 자리를 찾아 고쳐야 한다고 했었죠. 이 수업의 세 흐름은 승인 블록과 그 기한을 한 곳에 두고, 세 정의를 거기서 만들어 냅니다. 그래서 기한은 그 한 자리에서 고치고, 세 정의를 다시 생성하고 검증한 다음 새 판본으로 배포합니다. 복사해 둔 그림까지 자동으로 바뀌는 것은 아닙니다. 여러분이 화면에서 직접 연결한 흐름이라면 세 흐름에 같은 값을 넣어 주는 것이고요. 그런데 기억해 둘 게 있어요. 고친 정의를 새 판본으로 배포해도, 이미 열려 있던 처리 건은 열릴 때의 판본으로 끝까지 갑니다. 바뀐 기한은 다음 경보부터 적용돼요. 수정한 뒤에는 정상 처리뿐 아니라 거절과 지연 경로도 다시 확인합니다. 승인 기한을 줄였더니 불필요한 알림만 많아지지는 않았는지, 같은 기준의 기록으로 비교해야겠죠. BPM의 분석, 설계, 실행, 모니터링, 개선이 이렇게 한 바퀴를 도는 겁니다. 실행이 남긴 기록이 다시 다음 설계의 출발점이 되는 거죠.</a:t>
+              <a:t>사람의 셋째 일, 프로세스를 고치는 일이 어떻게 돌아가는지 보겠습니다. 프로세스는 한 번 설계하고 끝나는 게 아니에요. 실행이 남긴 기록이 다음 설계로 돌아옵니다. 화면의 네 칸을 따라가 볼게요. 경보가 처리 건을 열고 끝 이벤트에 닿으면, 단계의 시각과 승인, 결과 보고가 기록으로 남죠. 그 기록에서 오래 걸린 단계를 찾고, 여러 건을 모아 사이클 타임과 대기 시간, 거절률로 요약합니다. 승인 응답이 오래 걸리거나 거절이 많으면, 먼저 이유를 조사합니다. 정보가 부족한지, 담당자가 없는지, 승인 기준에 문제가 있는지에 따라 바꿀 곳이 달라지죠. 확인한 원인에 맞춰 정의나 운영 방식을 고칩니다. 고친 정의는 새 판본으로 배포하고, 다음 경보부터 그 판본으로 처리 건이 열립니다. 예를 하나 들어 볼게요. 승인 대기가 자주 길어져서 지연 알림 기한을 바꾸기로 했다고 해 보죠. 업무마다 처음부터 따로 그렸다면 그림마다 다른 자리를 찾아 고쳐야 한다고 했었죠. 이 수업의 세 흐름은 승인 블록과 그 기한을 한 곳에 두고, 세 정의를 거기서 만들어 냅니다. 그래서 기한은 그 한 자리에서 고치고, 세 정의를 다시 생성하고 검증한 다음 새 판본으로 배포합니다. 복사해 둔 그림까지 자동으로 바뀌는 것은 아닙니다. 강사가 화면에서 직접 연결한 흐름이라면 세 흐름에 같은 값을 넣어 주는 것이고요. 그런데 기억해 둘 게 있어요. 고친 정의를 새 판본으로 배포해도, 이미 열려 있던 처리 건은 열릴 때의 판본으로 끝까지 갑니다. 바뀐 기한은 다음 경보부터 적용돼요. 수정한 뒤에는 정상 처리뿐 아니라 거절과 지연 경로도 다시 확인합니다. 승인 기한을 줄였더니 불필요한 알림만 많아지지는 않았는지, 같은 기준의 기록으로 비교해야겠죠. BPM의 분석, 설계, 실행, 모니터링, 개선이 이렇게 한 바퀴를 도는 겁니다. 실행이 남긴 기록이 다시 다음 설계의 출발점이 되는 거죠.</a:t>
             </a:r>
           </a:p>
         </p:txBody>
@@ -4552,7 +4552,7 @@
           <a:lstStyle/>
           <a:p>
             <a:r>
-              <a:t>고른 답을 정답과 하나씩 맞춰 볼게요. 첫 문제의 정답은 2번입니다. 거절 종결에 닿았다는 건, 발주로 가는 선을 지나지 않았다는 뜻이에요. 문제에서 다른 재고 변화는 없다고 했으므로, 처리 건은 닫혔지만 재고 부족은 그대로 남아 있죠. 1번은 처리 건이 닫힌 것과 업무가 해결된 것을 헷갈렸고요, 3번은 거절 경로에서는 발주 자체가 없다는 걸 놓쳤습니다. 4번의 타이머는 알림만 보낼 뿐, 처리 건을 닫지 않아요. 두 번째 문제의 정답은 4번이에요. 단계마다 남은 시작과 끝의 시각이 어디를 더 조사할지 알려 줍니다. 반복되는 지연과 대기 이유, 아직 끝나지 않은 건까지 확인해야 병목을 판단할 수 있어요. 1번과 2번은 처리 건이 어떻게 끝났는지를 알려 주는 기록이지, 시간을 알려 주지는 않죠. 3번은 그림의 표식이라서 처리 건마다 달라지는 시간을 담고 있지 않습니다. 세 번째 문제의 정답은 3번입니다. 이 수업에서 유지하기로 한 정책은 에이전트가 제안하고, 책임질 역할이 승인한 뒤에 업무를 실행하는 것입니다. 1번과 2번은 사람의 결정을 아예 없애는 설계예요. 4번은 사람이 결정하지 않았는데 기한이 지났다고 효과가 나가는 설계고요. 이런 흐름은 등록하기 전 검사에서도 받아 주지 않습니다. 여기까지가 이번 회차입니다. 다음 회차는 과정의 마지막 회차예요. 지금까지 쌓은 지식과 에이전트, 프로세스를 되짚고, 각자의 작은 업무 주제에 적용해서 지식 구조와 에이전트, 업무 흐름을 직접 만들어 보겠습니다. 이번 회차도 수고 많으셨습니다. 감사합니다.</a:t>
+              <a:t>고른 답을 정답과 하나씩 맞춰 볼게요. 첫 문제의 정답은 2번입니다. 거절 종결에 닿았다는 건, 발주로 가는 선을 지나지 않았다는 뜻이에요. 문제에서 다른 재고 변화는 없다고 했으므로, 처리 건은 닫혔지만 재고 부족은 그대로 남아 있죠. 1번은 처리 건이 닫힌 것과 업무가 해결된 것을 헷갈렸고요, 3번은 거절 경로에서는 발주 자체가 없다는 걸 놓쳤습니다. 4번의 타이머는 알림만 보낼 뿐, 처리 건을 닫지 않아요. 두 번째 문제의 정답은 4번이에요. 단계마다 남은 시작과 끝의 시각이 어디를 더 조사할지 알려 줍니다. 반복되는 지연과 대기 이유, 아직 끝나지 않은 건까지 확인해야 병목을 판단할 수 있어요. 1번과 2번은 처리 건이 어떻게 끝났는지를 알려 주는 기록이지, 시간을 알려 주지는 않죠. 3번은 그림의 표식이라서 처리 건마다 달라지는 시간을 담고 있지 않습니다. 세 번째 문제의 정답은 3번입니다. 이 수업에서 유지하기로 한 정책은 에이전트가 제안하고, 책임질 역할이 승인한 뒤에 업무를 실행하는 것입니다. 1번과 2번은 사람의 결정을 아예 없애는 설계예요. 4번은 사람이 결정하지 않았는데 기한이 지났다고 효과가 나가는 설계고요. 이런 흐름은 등록하기 전 검사에서도 받아 주지 않습니다. 여기까지가 이번 회차입니다. 다음 회차는 과정의 마지막 회차예요. 지금까지 쌓은 지식과 에이전트, 프로세스를 되짚고, 강사가 정한 작은 업무 주제에 적용해서 지식 구조와 에이전트, 업무 흐름을 직접 만들어 보겠습니다. 이번 회차도 수고 많으셨습니다. 감사합니다.</a:t>
             </a:r>
           </a:p>
         </p:txBody>

--- a/산출물/교재/PPTX/실전반_온라인/실전반_07일차.pptx
+++ b/산출물/교재/PPTX/실전반_온라인/실전반_07일차.pptx
@@ -2732,7 +2732,7 @@
           <a:lstStyle/>
           <a:p>
             <a:r>
-              <a:t>이번 시간에는 이번 회차를 정리합니다. 세 업무의 처리 건을 시작 이벤트에서 종료 기록까지 되짚고, 온톨로지와 에이전트, 프로세스가 어떻게 이어지는지 확인한 다음, 복습과 퀴즈로 마무리할게요. 앞의 실습은 정기 점검과 재고 보충 프로세스를 직접 그리고 실행해 보는 과정이었습니다. 아직 결과가 다 나오지 않았더라도, 어디까지 진행됐는지 기록을 놓고 비교해 보겠습니다. 긴급 대응의 처리 건은 쿨러 사건으로 이미 끝까지 따라왔고요. 여기서는 강사가 확인한 기록과 비교할 수 있도록 미리 끝까지 보내 둔 처리 건 셋을 나란히 놓고 봅니다. 화면의 번호나 시각이 실습의 처리 건과 다른 건 그래서예요. 이 세 건을 되짚는 게 네 번째 단원, 세 처리 건이 지나는 다섯 자리입니다. 업무가 서로 다른 이 세 처리 건은 시작 이벤트에서 종료 기록까지 무엇을 거쳤을까요? 그 사이에 무엇이 누구에게 건너갔을까요? AI와 사람이 함께 수행한 업무 흐름을 이 세 건으로 정리해 보겠습니다.</a:t>
+              <a:t>이번 시간에는 이번 회차를 정리합니다. 세 업무의 처리 건을 시작 이벤트에서 종료 기록까지 되짚고, 온톨로지와 에이전트, 프로세스가 어떻게 이어지는지 확인한 다음, 복습과 퀴즈로 마무리할게요. 앞의 실습은 정기 점검과 재고 보충 프로세스를 직접 그리고 실행해 보는 과정이었습니다. 아직 결과가 다 나오지 않았더라도, 어디까지 진행됐는지 기록을 놓고 비교해 보겠습니다. 긴급 대응의 처리 건은 쿨러 사건으로 이미 끝까지 따라왔고요. 여기서는 실습에서 확인한 기록과 비교할 수 있도록 미리 끝까지 보내 둔 처리 건 셋을 나란히 놓고 봅니다. 화면의 번호나 시각이 실습의 처리 건과 다른 건 그래서예요. 이 세 건을 되짚는 게 네 번째 단원, 세 처리 건이 지나는 다섯 자리입니다. 업무가 서로 다른 이 세 처리 건은 시작 이벤트에서 종료 기록까지 무엇을 거쳤을까요? 그 사이에 무엇이 누구에게 건너갔을까요? AI와 사람이 함께 수행한 업무 흐름을 이 세 건으로 정리해 보겠습니다.</a:t>
             </a:r>
           </a:p>
         </p:txBody>
@@ -3992,7 +3992,7 @@
           <a:lstStyle/>
           <a:p>
             <a:r>
-              <a:t>사람의 셋째 일, 프로세스를 고치는 일이 어떻게 돌아가는지 보겠습니다. 프로세스는 한 번 설계하고 끝나는 게 아니에요. 실행이 남긴 기록이 다음 설계로 돌아옵니다. 화면의 네 칸을 따라가 볼게요. 경보가 처리 건을 열고 끝 이벤트에 닿으면, 단계의 시각과 승인, 결과 보고가 기록으로 남죠. 그 기록에서 오래 걸린 단계를 찾고, 여러 건을 모아 사이클 타임과 대기 시간, 거절률로 요약합니다. 승인 응답이 오래 걸리거나 거절이 많으면, 먼저 이유를 조사합니다. 정보가 부족한지, 담당자가 없는지, 승인 기준에 문제가 있는지에 따라 바꿀 곳이 달라지죠. 확인한 원인에 맞춰 정의나 운영 방식을 고칩니다. 고친 정의는 새 판본으로 배포하고, 다음 경보부터 그 판본으로 처리 건이 열립니다. 예를 하나 들어 볼게요. 승인 대기가 자주 길어져서 지연 알림 기한을 바꾸기로 했다고 해 보죠. 업무마다 처음부터 따로 그렸다면 그림마다 다른 자리를 찾아 고쳐야 한다고 했었죠. 이 수업의 세 흐름은 승인 블록과 그 기한을 한 곳에 두고, 세 정의를 거기서 만들어 냅니다. 그래서 기한은 그 한 자리에서 고치고, 세 정의를 다시 생성하고 검증한 다음 새 판본으로 배포합니다. 복사해 둔 그림까지 자동으로 바뀌는 것은 아닙니다. 강사가 화면에서 직접 연결한 흐름이라면 세 흐름에 같은 값을 넣어 주는 것이고요. 그런데 기억해 둘 게 있어요. 고친 정의를 새 판본으로 배포해도, 이미 열려 있던 처리 건은 열릴 때의 판본으로 끝까지 갑니다. 바뀐 기한은 다음 경보부터 적용돼요. 수정한 뒤에는 정상 처리뿐 아니라 거절과 지연 경로도 다시 확인합니다. 승인 기한을 줄였더니 불필요한 알림만 많아지지는 않았는지, 같은 기준의 기록으로 비교해야겠죠. BPM의 분석, 설계, 실행, 모니터링, 개선이 이렇게 한 바퀴를 도는 겁니다. 실행이 남긴 기록이 다시 다음 설계의 출발점이 되는 거죠.</a:t>
+              <a:t>사람의 셋째 일, 프로세스를 고치는 일이 어떻게 돌아가는지 보겠습니다. 프로세스는 한 번 설계하고 끝나는 게 아니에요. 실행이 남긴 기록이 다음 설계로 돌아옵니다. 화면의 네 칸을 따라가 볼게요. 경보가 처리 건을 열고 끝 이벤트에 닿으면, 단계의 시각과 승인, 결과 보고가 기록으로 남죠. 그 기록에서 오래 걸린 단계를 찾고, 여러 건을 모아 사이클 타임과 대기 시간, 거절률로 요약합니다. 승인 응답이 오래 걸리거나 거절이 많으면, 먼저 이유를 조사합니다. 정보가 부족한지, 담당자가 없는지, 승인 기준에 문제가 있는지에 따라 바꿀 곳이 달라지죠. 확인한 원인에 맞춰 정의나 운영 방식을 고칩니다. 고친 정의는 새 판본으로 배포하고, 다음 경보부터 그 판본으로 처리 건이 열립니다. 예를 하나 들어 볼게요. 승인 대기가 자주 길어져서 지연 알림 기한을 바꾸기로 했다고 해 보죠. 업무마다 처음부터 따로 그렸다면 그림마다 다른 자리를 찾아 고쳐야 한다고 했었죠. 이 수업의 세 흐름은 승인 블록과 그 기한을 한 곳에 두고, 세 정의를 거기서 만들어 냅니다. 그래서 기한은 그 한 자리에서 고치고, 세 정의를 다시 생성하고 검증한 다음 새 판본으로 배포합니다. 복사해 둔 그림까지 자동으로 바뀌는 것은 아닙니다. 제가 화면에서 직접 연결한 흐름이라면 세 흐름에 같은 값을 넣어 주는 것이고요. 그런데 기억해 둘 게 있어요. 고친 정의를 새 판본으로 배포해도, 이미 열려 있던 처리 건은 열릴 때의 판본으로 끝까지 갑니다. 바뀐 기한은 다음 경보부터 적용돼요. 수정한 뒤에는 정상 처리뿐 아니라 거절과 지연 경로도 다시 확인합니다. 승인 기한을 줄였더니 불필요한 알림만 많아지지는 않았는지, 같은 기준의 기록으로 비교해야겠죠. BPM의 분석, 설계, 실행, 모니터링, 개선이 이렇게 한 바퀴를 도는 겁니다. 실행이 남긴 기록이 다시 다음 설계의 출발점이 되는 거죠.</a:t>
             </a:r>
           </a:p>
         </p:txBody>
@@ -4552,7 +4552,7 @@
           <a:lstStyle/>
           <a:p>
             <a:r>
-              <a:t>고른 답을 정답과 하나씩 맞춰 볼게요. 첫 문제의 정답은 2번입니다. 거절 종결에 닿았다는 건, 발주로 가는 선을 지나지 않았다는 뜻이에요. 문제에서 다른 재고 변화는 없다고 했으므로, 처리 건은 닫혔지만 재고 부족은 그대로 남아 있죠. 1번은 처리 건이 닫힌 것과 업무가 해결된 것을 헷갈렸고요, 3번은 거절 경로에서는 발주 자체가 없다는 걸 놓쳤습니다. 4번의 타이머는 알림만 보낼 뿐, 처리 건을 닫지 않아요. 두 번째 문제의 정답은 4번이에요. 단계마다 남은 시작과 끝의 시각이 어디를 더 조사할지 알려 줍니다. 반복되는 지연과 대기 이유, 아직 끝나지 않은 건까지 확인해야 병목을 판단할 수 있어요. 1번과 2번은 처리 건이 어떻게 끝났는지를 알려 주는 기록이지, 시간을 알려 주지는 않죠. 3번은 그림의 표식이라서 처리 건마다 달라지는 시간을 담고 있지 않습니다. 세 번째 문제의 정답은 3번입니다. 이 수업에서 유지하기로 한 정책은 에이전트가 제안하고, 책임질 역할이 승인한 뒤에 업무를 실행하는 것입니다. 1번과 2번은 사람의 결정을 아예 없애는 설계예요. 4번은 사람이 결정하지 않았는데 기한이 지났다고 효과가 나가는 설계고요. 이런 흐름은 등록하기 전 검사에서도 받아 주지 않습니다. 여기까지가 이번 회차입니다. 다음 회차는 과정의 마지막 회차예요. 지금까지 쌓은 지식과 에이전트, 프로세스를 되짚고, 강사가 정한 작은 업무 주제에 적용해서 지식 구조와 에이전트, 업무 흐름을 직접 만들어 보겠습니다. 이번 회차도 수고 많으셨습니다. 감사합니다.</a:t>
+              <a:t>고른 답을 정답과 하나씩 맞춰 볼게요. 첫 문제의 정답은 2번입니다. 거절 종결에 닿았다는 건, 발주로 가는 선을 지나지 않았다는 뜻이에요. 문제에서 다른 재고 변화는 없다고 했으므로, 처리 건은 닫혔지만 재고 부족은 그대로 남아 있죠. 1번은 처리 건이 닫힌 것과 업무가 해결된 것을 헷갈렸고요, 3번은 거절 경로에서는 발주 자체가 없다는 걸 놓쳤습니다. 4번의 타이머는 알림만 보낼 뿐, 처리 건을 닫지 않아요. 두 번째 문제의 정답은 4번이에요. 단계마다 남은 시작과 끝의 시각이 어디를 더 조사할지 알려 줍니다. 반복되는 지연과 대기 이유, 아직 끝나지 않은 건까지 확인해야 병목을 판단할 수 있어요. 1번과 2번은 처리 건이 어떻게 끝났는지를 알려 주는 기록이지, 시간을 알려 주지는 않죠. 3번은 그림의 표식이라서 처리 건마다 달라지는 시간을 담고 있지 않습니다. 세 번째 문제의 정답은 3번입니다. 이 수업에서 유지하기로 한 정책은 에이전트가 제안하고, 책임질 역할이 승인한 뒤에 업무를 실행하는 것입니다. 1번과 2번은 사람의 결정을 아예 없애는 설계예요. 4번은 사람이 결정하지 않았는데 기한이 지났다고 효과가 나가는 설계고요. 이런 흐름은 등록하기 전 검사에서도 받아 주지 않습니다. 여기까지가 이번 회차입니다. 다음 회차는 과정의 마지막 회차예요. 지금까지 쌓은 지식과 에이전트, 프로세스를 되짚고, 생산·정비 조율 업무에 적용해서 지식 구조와 에이전트, 업무 흐름을 직접 만들어 보겠습니다. 이번 회차도 수고 많으셨습니다. 감사합니다.</a:t>
             </a:r>
           </a:p>
         </p:txBody>
